--- a/doc/개발환경_설치매뉴얼(Gitea).pptx
+++ b/doc/개발환경_설치매뉴얼(Gitea).pptx
@@ -7,13 +7,15 @@
   <p:sldIdLst>
     <p:sldId id="256" r:id="rId2"/>
     <p:sldId id="257" r:id="rId3"/>
-    <p:sldId id="258" r:id="rId4"/>
-    <p:sldId id="259" r:id="rId5"/>
-    <p:sldId id="260" r:id="rId6"/>
-    <p:sldId id="261" r:id="rId7"/>
-    <p:sldId id="262" r:id="rId8"/>
-    <p:sldId id="263" r:id="rId9"/>
-    <p:sldId id="264" r:id="rId10"/>
+    <p:sldId id="259" r:id="rId4"/>
+    <p:sldId id="260" r:id="rId5"/>
+    <p:sldId id="261" r:id="rId6"/>
+    <p:sldId id="262" r:id="rId7"/>
+    <p:sldId id="263" r:id="rId8"/>
+    <p:sldId id="264" r:id="rId9"/>
+    <p:sldId id="265" r:id="rId10"/>
+    <p:sldId id="266" r:id="rId11"/>
+    <p:sldId id="267" r:id="rId12"/>
   </p:sldIdLst>
   <p:sldSz cx="12192000" cy="6858000"/>
   <p:notesSz cx="6858000" cy="9144000"/>
@@ -3355,7 +3357,10 @@
           <a:bodyPr/>
           <a:lstStyle/>
           <a:p>
-            <a:endParaRPr lang="ko-KR" altLang="en-US"/>
+            <a:r>
+              <a:rPr lang="ko-KR" altLang="en-US" dirty="0"/>
+              <a:t>개발환경 설치 매뉴얼</a:t>
+            </a:r>
           </a:p>
         </p:txBody>
       </p:sp>
@@ -3380,7 +3385,11 @@
           <a:bodyPr/>
           <a:lstStyle/>
           <a:p>
-            <a:endParaRPr lang="ko-KR" altLang="en-US"/>
+            <a:r>
+              <a:rPr lang="en-US" altLang="ko-KR" dirty="0" err="1"/>
+              <a:t>Gitea</a:t>
+            </a:r>
+            <a:endParaRPr lang="ko-KR" altLang="en-US" dirty="0"/>
           </a:p>
         </p:txBody>
       </p:sp>
@@ -3388,6 +3397,210 @@
     <p:extLst>
       <p:ext uri="{BB962C8B-B14F-4D97-AF65-F5344CB8AC3E}">
         <p14:creationId xmlns:p14="http://schemas.microsoft.com/office/powerpoint/2010/main" val="2125033316"/>
+      </p:ext>
+    </p:extLst>
+  </p:cSld>
+  <p:clrMapOvr>
+    <a:masterClrMapping/>
+  </p:clrMapOvr>
+</p:sld>
+</file>
+
+<file path=ppt/slides/slide10.xml><?xml version="1.0" encoding="utf-8"?>
+<p:sld xmlns:a="http://schemas.openxmlformats.org/drawingml/2006/main" xmlns:r="http://schemas.openxmlformats.org/officeDocument/2006/relationships" xmlns:p="http://schemas.openxmlformats.org/presentationml/2006/main">
+  <p:cSld>
+    <p:spTree>
+      <p:nvGrpSpPr>
+        <p:cNvPr id="1" name=""/>
+        <p:cNvGrpSpPr/>
+        <p:nvPr/>
+      </p:nvGrpSpPr>
+      <p:grpSpPr>
+        <a:xfrm>
+          <a:off x="0" y="0"/>
+          <a:ext cx="0" cy="0"/>
+          <a:chOff x="0" y="0"/>
+          <a:chExt cx="0" cy="0"/>
+        </a:xfrm>
+      </p:grpSpPr>
+      <p:sp>
+        <p:nvSpPr>
+          <p:cNvPr id="2" name="제목 1">
+            <a:extLst>
+              <a:ext uri="{FF2B5EF4-FFF2-40B4-BE49-F238E27FC236}">
+                <a16:creationId xmlns:a16="http://schemas.microsoft.com/office/drawing/2014/main" id="{8872C61B-B4AD-DAF0-17C1-FE0DEDC179DD}"/>
+              </a:ext>
+            </a:extLst>
+          </p:cNvPr>
+          <p:cNvSpPr>
+            <a:spLocks noGrp="1"/>
+          </p:cNvSpPr>
+          <p:nvPr>
+            <p:ph type="title"/>
+          </p:nvPr>
+        </p:nvSpPr>
+        <p:spPr/>
+        <p:txBody>
+          <a:bodyPr/>
+          <a:lstStyle/>
+          <a:p>
+            <a:endParaRPr lang="ko-KR" altLang="en-US"/>
+          </a:p>
+        </p:txBody>
+      </p:sp>
+      <p:pic>
+        <p:nvPicPr>
+          <p:cNvPr id="5" name="내용 개체 틀 4">
+            <a:extLst>
+              <a:ext uri="{FF2B5EF4-FFF2-40B4-BE49-F238E27FC236}">
+                <a16:creationId xmlns:a16="http://schemas.microsoft.com/office/drawing/2014/main" id="{26B15BF9-5774-E305-6733-51A4DD2EE836}"/>
+              </a:ext>
+            </a:extLst>
+          </p:cNvPr>
+          <p:cNvPicPr>
+            <a:picLocks noGrp="1" noChangeAspect="1"/>
+          </p:cNvPicPr>
+          <p:nvPr>
+            <p:ph idx="1"/>
+          </p:nvPr>
+        </p:nvPicPr>
+        <p:blipFill>
+          <a:blip r:embed="rId2"/>
+          <a:stretch>
+            <a:fillRect/>
+          </a:stretch>
+        </p:blipFill>
+        <p:spPr>
+          <a:xfrm>
+            <a:off x="838200" y="1825625"/>
+            <a:ext cx="4967608" cy="3599815"/>
+          </a:xfrm>
+          <a:prstGeom prst="rect">
+            <a:avLst/>
+          </a:prstGeom>
+        </p:spPr>
+      </p:pic>
+      <p:pic>
+        <p:nvPicPr>
+          <p:cNvPr id="7" name="그림 6">
+            <a:extLst>
+              <a:ext uri="{FF2B5EF4-FFF2-40B4-BE49-F238E27FC236}">
+                <a16:creationId xmlns:a16="http://schemas.microsoft.com/office/drawing/2014/main" id="{162B0CA4-8F5E-1EF5-E592-0F5F87C9C6BD}"/>
+              </a:ext>
+            </a:extLst>
+          </p:cNvPr>
+          <p:cNvPicPr>
+            <a:picLocks noChangeAspect="1"/>
+          </p:cNvPicPr>
+          <p:nvPr/>
+        </p:nvPicPr>
+        <p:blipFill>
+          <a:blip r:embed="rId3"/>
+          <a:stretch>
+            <a:fillRect/>
+          </a:stretch>
+        </p:blipFill>
+        <p:spPr>
+          <a:xfrm>
+            <a:off x="5806616" y="1825625"/>
+            <a:ext cx="5547184" cy="4351338"/>
+          </a:xfrm>
+          <a:prstGeom prst="rect">
+            <a:avLst/>
+          </a:prstGeom>
+        </p:spPr>
+      </p:pic>
+    </p:spTree>
+    <p:extLst>
+      <p:ext uri="{BB962C8B-B14F-4D97-AF65-F5344CB8AC3E}">
+        <p14:creationId xmlns:p14="http://schemas.microsoft.com/office/powerpoint/2010/main" val="1984665353"/>
+      </p:ext>
+    </p:extLst>
+  </p:cSld>
+  <p:clrMapOvr>
+    <a:masterClrMapping/>
+  </p:clrMapOvr>
+</p:sld>
+</file>
+
+<file path=ppt/slides/slide11.xml><?xml version="1.0" encoding="utf-8"?>
+<p:sld xmlns:a="http://schemas.openxmlformats.org/drawingml/2006/main" xmlns:r="http://schemas.openxmlformats.org/officeDocument/2006/relationships" xmlns:p="http://schemas.openxmlformats.org/presentationml/2006/main">
+  <p:cSld>
+    <p:spTree>
+      <p:nvGrpSpPr>
+        <p:cNvPr id="1" name=""/>
+        <p:cNvGrpSpPr/>
+        <p:nvPr/>
+      </p:nvGrpSpPr>
+      <p:grpSpPr>
+        <a:xfrm>
+          <a:off x="0" y="0"/>
+          <a:ext cx="0" cy="0"/>
+          <a:chOff x="0" y="0"/>
+          <a:chExt cx="0" cy="0"/>
+        </a:xfrm>
+      </p:grpSpPr>
+      <p:sp>
+        <p:nvSpPr>
+          <p:cNvPr id="2" name="제목 1">
+            <a:extLst>
+              <a:ext uri="{FF2B5EF4-FFF2-40B4-BE49-F238E27FC236}">
+                <a16:creationId xmlns:a16="http://schemas.microsoft.com/office/drawing/2014/main" id="{000CF4A2-4F22-867B-426E-EF442E140473}"/>
+              </a:ext>
+            </a:extLst>
+          </p:cNvPr>
+          <p:cNvSpPr>
+            <a:spLocks noGrp="1"/>
+          </p:cNvSpPr>
+          <p:nvPr>
+            <p:ph type="title"/>
+          </p:nvPr>
+        </p:nvSpPr>
+        <p:spPr/>
+        <p:txBody>
+          <a:bodyPr/>
+          <a:lstStyle/>
+          <a:p>
+            <a:endParaRPr lang="ko-KR" altLang="en-US"/>
+          </a:p>
+        </p:txBody>
+      </p:sp>
+      <p:pic>
+        <p:nvPicPr>
+          <p:cNvPr id="5" name="내용 개체 틀 4">
+            <a:extLst>
+              <a:ext uri="{FF2B5EF4-FFF2-40B4-BE49-F238E27FC236}">
+                <a16:creationId xmlns:a16="http://schemas.microsoft.com/office/drawing/2014/main" id="{C196696F-9990-CA64-36E7-775BCB6357D8}"/>
+              </a:ext>
+            </a:extLst>
+          </p:cNvPr>
+          <p:cNvPicPr>
+            <a:picLocks noGrp="1" noChangeAspect="1"/>
+          </p:cNvPicPr>
+          <p:nvPr>
+            <p:ph idx="1"/>
+          </p:nvPr>
+        </p:nvPicPr>
+        <p:blipFill>
+          <a:blip r:embed="rId2"/>
+          <a:stretch>
+            <a:fillRect/>
+          </a:stretch>
+        </p:blipFill>
+        <p:spPr>
+          <a:xfrm>
+            <a:off x="1386316" y="1825625"/>
+            <a:ext cx="9419367" cy="4351338"/>
+          </a:xfrm>
+          <a:prstGeom prst="rect">
+            <a:avLst/>
+          </a:prstGeom>
+        </p:spPr>
+      </p:pic>
+    </p:spTree>
+    <p:extLst>
+      <p:ext uri="{BB962C8B-B14F-4D97-AF65-F5344CB8AC3E}">
+        <p14:creationId xmlns:p14="http://schemas.microsoft.com/office/powerpoint/2010/main" val="2476474575"/>
       </p:ext>
     </p:extLst>
   </p:cSld>
@@ -3506,93 +3719,6 @@
           <p:cNvPr id="2" name="제목 1">
             <a:extLst>
               <a:ext uri="{FF2B5EF4-FFF2-40B4-BE49-F238E27FC236}">
-                <a16:creationId xmlns:a16="http://schemas.microsoft.com/office/drawing/2014/main" id="{21FEC82E-A496-0AF2-5531-4E9796D12EEB}"/>
-              </a:ext>
-            </a:extLst>
-          </p:cNvPr>
-          <p:cNvSpPr>
-            <a:spLocks noGrp="1"/>
-          </p:cNvSpPr>
-          <p:nvPr>
-            <p:ph type="title"/>
-          </p:nvPr>
-        </p:nvSpPr>
-        <p:spPr/>
-        <p:txBody>
-          <a:bodyPr/>
-          <a:lstStyle/>
-          <a:p>
-            <a:endParaRPr lang="ko-KR" altLang="en-US"/>
-          </a:p>
-        </p:txBody>
-      </p:sp>
-      <p:pic>
-        <p:nvPicPr>
-          <p:cNvPr id="7" name="내용 개체 틀 6">
-            <a:extLst>
-              <a:ext uri="{FF2B5EF4-FFF2-40B4-BE49-F238E27FC236}">
-                <a16:creationId xmlns:a16="http://schemas.microsoft.com/office/drawing/2014/main" id="{481A5A7A-5727-6A1F-46BD-8F1CBC67CA38}"/>
-              </a:ext>
-            </a:extLst>
-          </p:cNvPr>
-          <p:cNvPicPr>
-            <a:picLocks noGrp="1" noChangeAspect="1"/>
-          </p:cNvPicPr>
-          <p:nvPr>
-            <p:ph idx="1"/>
-          </p:nvPr>
-        </p:nvPicPr>
-        <p:blipFill>
-          <a:blip r:embed="rId2"/>
-          <a:stretch>
-            <a:fillRect/>
-          </a:stretch>
-        </p:blipFill>
-        <p:spPr>
-          <a:xfrm>
-            <a:off x="1985258" y="1825625"/>
-            <a:ext cx="8221484" cy="4351338"/>
-          </a:xfrm>
-          <a:prstGeom prst="rect">
-            <a:avLst/>
-          </a:prstGeom>
-        </p:spPr>
-      </p:pic>
-    </p:spTree>
-    <p:extLst>
-      <p:ext uri="{BB962C8B-B14F-4D97-AF65-F5344CB8AC3E}">
-        <p14:creationId xmlns:p14="http://schemas.microsoft.com/office/powerpoint/2010/main" val="2731477037"/>
-      </p:ext>
-    </p:extLst>
-  </p:cSld>
-  <p:clrMapOvr>
-    <a:masterClrMapping/>
-  </p:clrMapOvr>
-</p:sld>
-</file>
-
-<file path=ppt/slides/slide4.xml><?xml version="1.0" encoding="utf-8"?>
-<p:sld xmlns:a="http://schemas.openxmlformats.org/drawingml/2006/main" xmlns:r="http://schemas.openxmlformats.org/officeDocument/2006/relationships" xmlns:p="http://schemas.openxmlformats.org/presentationml/2006/main">
-  <p:cSld>
-    <p:spTree>
-      <p:nvGrpSpPr>
-        <p:cNvPr id="1" name=""/>
-        <p:cNvGrpSpPr/>
-        <p:nvPr/>
-      </p:nvGrpSpPr>
-      <p:grpSpPr>
-        <a:xfrm>
-          <a:off x="0" y="0"/>
-          <a:ext cx="0" cy="0"/>
-          <a:chOff x="0" y="0"/>
-          <a:chExt cx="0" cy="0"/>
-        </a:xfrm>
-      </p:grpSpPr>
-      <p:sp>
-        <p:nvSpPr>
-          <p:cNvPr id="2" name="제목 1">
-            <a:extLst>
-              <a:ext uri="{FF2B5EF4-FFF2-40B4-BE49-F238E27FC236}">
                 <a16:creationId xmlns:a16="http://schemas.microsoft.com/office/drawing/2014/main" id="{8425AC1B-FBE8-3325-9830-9D5E80B913AE}"/>
               </a:ext>
             </a:extLst>
@@ -3658,7 +3784,7 @@
 </p:sld>
 </file>
 
-<file path=ppt/slides/slide5.xml><?xml version="1.0" encoding="utf-8"?>
+<file path=ppt/slides/slide4.xml><?xml version="1.0" encoding="utf-8"?>
 <p:sld xmlns:a="http://schemas.openxmlformats.org/drawingml/2006/main" xmlns:r="http://schemas.openxmlformats.org/officeDocument/2006/relationships" xmlns:p="http://schemas.openxmlformats.org/presentationml/2006/main">
   <p:cSld>
     <p:spTree>
@@ -3745,7 +3871,7 @@
 </p:sld>
 </file>
 
-<file path=ppt/slides/slide6.xml><?xml version="1.0" encoding="utf-8"?>
+<file path=ppt/slides/slide5.xml><?xml version="1.0" encoding="utf-8"?>
 <p:sld xmlns:a="http://schemas.openxmlformats.org/drawingml/2006/main" xmlns:r="http://schemas.openxmlformats.org/officeDocument/2006/relationships" xmlns:p="http://schemas.openxmlformats.org/presentationml/2006/main">
   <p:cSld>
     <p:spTree>
@@ -3832,7 +3958,7 @@
 </p:sld>
 </file>
 
-<file path=ppt/slides/slide7.xml><?xml version="1.0" encoding="utf-8"?>
+<file path=ppt/slides/slide6.xml><?xml version="1.0" encoding="utf-8"?>
 <p:sld xmlns:a="http://schemas.openxmlformats.org/drawingml/2006/main" xmlns:r="http://schemas.openxmlformats.org/officeDocument/2006/relationships" xmlns:p="http://schemas.openxmlformats.org/presentationml/2006/main">
   <p:cSld>
     <p:spTree>
@@ -3919,7 +4045,7 @@
 </p:sld>
 </file>
 
-<file path=ppt/slides/slide8.xml><?xml version="1.0" encoding="utf-8"?>
+<file path=ppt/slides/slide7.xml><?xml version="1.0" encoding="utf-8"?>
 <p:sld xmlns:a="http://schemas.openxmlformats.org/drawingml/2006/main" xmlns:r="http://schemas.openxmlformats.org/officeDocument/2006/relationships" xmlns:p="http://schemas.openxmlformats.org/presentationml/2006/main">
   <p:cSld>
     <p:spTree>
@@ -4301,7 +4427,7 @@
 </p:sld>
 </file>
 
-<file path=ppt/slides/slide9.xml><?xml version="1.0" encoding="utf-8"?>
+<file path=ppt/slides/slide8.xml><?xml version="1.0" encoding="utf-8"?>
 <p:sld xmlns:a="http://schemas.openxmlformats.org/drawingml/2006/main" xmlns:r="http://schemas.openxmlformats.org/officeDocument/2006/relationships" xmlns:p="http://schemas.openxmlformats.org/presentationml/2006/main">
   <p:cSld>
     <p:spTree>
@@ -4379,6 +4505,93 @@
     <p:extLst>
       <p:ext uri="{BB962C8B-B14F-4D97-AF65-F5344CB8AC3E}">
         <p14:creationId xmlns:p14="http://schemas.microsoft.com/office/powerpoint/2010/main" val="1209892776"/>
+      </p:ext>
+    </p:extLst>
+  </p:cSld>
+  <p:clrMapOvr>
+    <a:masterClrMapping/>
+  </p:clrMapOvr>
+</p:sld>
+</file>
+
+<file path=ppt/slides/slide9.xml><?xml version="1.0" encoding="utf-8"?>
+<p:sld xmlns:a="http://schemas.openxmlformats.org/drawingml/2006/main" xmlns:r="http://schemas.openxmlformats.org/officeDocument/2006/relationships" xmlns:p="http://schemas.openxmlformats.org/presentationml/2006/main">
+  <p:cSld>
+    <p:spTree>
+      <p:nvGrpSpPr>
+        <p:cNvPr id="1" name=""/>
+        <p:cNvGrpSpPr/>
+        <p:nvPr/>
+      </p:nvGrpSpPr>
+      <p:grpSpPr>
+        <a:xfrm>
+          <a:off x="0" y="0"/>
+          <a:ext cx="0" cy="0"/>
+          <a:chOff x="0" y="0"/>
+          <a:chExt cx="0" cy="0"/>
+        </a:xfrm>
+      </p:grpSpPr>
+      <p:sp>
+        <p:nvSpPr>
+          <p:cNvPr id="2" name="제목 1">
+            <a:extLst>
+              <a:ext uri="{FF2B5EF4-FFF2-40B4-BE49-F238E27FC236}">
+                <a16:creationId xmlns:a16="http://schemas.microsoft.com/office/drawing/2014/main" id="{4D68FF56-CC25-5672-F5CE-8ADFE8D551F7}"/>
+              </a:ext>
+            </a:extLst>
+          </p:cNvPr>
+          <p:cNvSpPr>
+            <a:spLocks noGrp="1"/>
+          </p:cNvSpPr>
+          <p:nvPr>
+            <p:ph type="title"/>
+          </p:nvPr>
+        </p:nvSpPr>
+        <p:spPr/>
+        <p:txBody>
+          <a:bodyPr/>
+          <a:lstStyle/>
+          <a:p>
+            <a:endParaRPr lang="ko-KR" altLang="en-US"/>
+          </a:p>
+        </p:txBody>
+      </p:sp>
+      <p:pic>
+        <p:nvPicPr>
+          <p:cNvPr id="5" name="내용 개체 틀 4">
+            <a:extLst>
+              <a:ext uri="{FF2B5EF4-FFF2-40B4-BE49-F238E27FC236}">
+                <a16:creationId xmlns:a16="http://schemas.microsoft.com/office/drawing/2014/main" id="{128D8937-36A0-B9D9-72DA-502F5084C5F1}"/>
+              </a:ext>
+            </a:extLst>
+          </p:cNvPr>
+          <p:cNvPicPr>
+            <a:picLocks noGrp="1" noChangeAspect="1"/>
+          </p:cNvPicPr>
+          <p:nvPr>
+            <p:ph idx="1"/>
+          </p:nvPr>
+        </p:nvPicPr>
+        <p:blipFill>
+          <a:blip r:embed="rId2"/>
+          <a:stretch>
+            <a:fillRect/>
+          </a:stretch>
+        </p:blipFill>
+        <p:spPr>
+          <a:xfrm>
+            <a:off x="838200" y="1690688"/>
+            <a:ext cx="10515600" cy="3046149"/>
+          </a:xfrm>
+          <a:prstGeom prst="rect">
+            <a:avLst/>
+          </a:prstGeom>
+        </p:spPr>
+      </p:pic>
+    </p:spTree>
+    <p:extLst>
+      <p:ext uri="{BB962C8B-B14F-4D97-AF65-F5344CB8AC3E}">
+        <p14:creationId xmlns:p14="http://schemas.microsoft.com/office/powerpoint/2010/main" val="2034050878"/>
       </p:ext>
     </p:extLst>
   </p:cSld>

--- a/doc/개발환경_설치매뉴얼(Gitea).pptx
+++ b/doc/개발환경_설치매뉴얼(Gitea).pptx
@@ -269,7 +269,7 @@
           <a:p>
             <a:fld id="{A03C0857-5E83-4ED7-8050-78E5F8A15FA7}" type="datetimeFigureOut">
               <a:rPr lang="ko-KR" altLang="en-US" smtClean="0"/>
-              <a:t>2025-09-03</a:t>
+              <a:t>2025-09-04</a:t>
             </a:fld>
             <a:endParaRPr lang="ko-KR" altLang="en-US"/>
           </a:p>
@@ -467,7 +467,7 @@
           <a:p>
             <a:fld id="{A03C0857-5E83-4ED7-8050-78E5F8A15FA7}" type="datetimeFigureOut">
               <a:rPr lang="ko-KR" altLang="en-US" smtClean="0"/>
-              <a:t>2025-09-03</a:t>
+              <a:t>2025-09-04</a:t>
             </a:fld>
             <a:endParaRPr lang="ko-KR" altLang="en-US"/>
           </a:p>
@@ -675,7 +675,7 @@
           <a:p>
             <a:fld id="{A03C0857-5E83-4ED7-8050-78E5F8A15FA7}" type="datetimeFigureOut">
               <a:rPr lang="ko-KR" altLang="en-US" smtClean="0"/>
-              <a:t>2025-09-03</a:t>
+              <a:t>2025-09-04</a:t>
             </a:fld>
             <a:endParaRPr lang="ko-KR" altLang="en-US"/>
           </a:p>
@@ -873,7 +873,7 @@
           <a:p>
             <a:fld id="{A03C0857-5E83-4ED7-8050-78E5F8A15FA7}" type="datetimeFigureOut">
               <a:rPr lang="ko-KR" altLang="en-US" smtClean="0"/>
-              <a:t>2025-09-03</a:t>
+              <a:t>2025-09-04</a:t>
             </a:fld>
             <a:endParaRPr lang="ko-KR" altLang="en-US"/>
           </a:p>
@@ -1148,7 +1148,7 @@
           <a:p>
             <a:fld id="{A03C0857-5E83-4ED7-8050-78E5F8A15FA7}" type="datetimeFigureOut">
               <a:rPr lang="ko-KR" altLang="en-US" smtClean="0"/>
-              <a:t>2025-09-03</a:t>
+              <a:t>2025-09-04</a:t>
             </a:fld>
             <a:endParaRPr lang="ko-KR" altLang="en-US"/>
           </a:p>
@@ -1413,7 +1413,7 @@
           <a:p>
             <a:fld id="{A03C0857-5E83-4ED7-8050-78E5F8A15FA7}" type="datetimeFigureOut">
               <a:rPr lang="ko-KR" altLang="en-US" smtClean="0"/>
-              <a:t>2025-09-03</a:t>
+              <a:t>2025-09-04</a:t>
             </a:fld>
             <a:endParaRPr lang="ko-KR" altLang="en-US"/>
           </a:p>
@@ -1825,7 +1825,7 @@
           <a:p>
             <a:fld id="{A03C0857-5E83-4ED7-8050-78E5F8A15FA7}" type="datetimeFigureOut">
               <a:rPr lang="ko-KR" altLang="en-US" smtClean="0"/>
-              <a:t>2025-09-03</a:t>
+              <a:t>2025-09-04</a:t>
             </a:fld>
             <a:endParaRPr lang="ko-KR" altLang="en-US"/>
           </a:p>
@@ -1966,7 +1966,7 @@
           <a:p>
             <a:fld id="{A03C0857-5E83-4ED7-8050-78E5F8A15FA7}" type="datetimeFigureOut">
               <a:rPr lang="ko-KR" altLang="en-US" smtClean="0"/>
-              <a:t>2025-09-03</a:t>
+              <a:t>2025-09-04</a:t>
             </a:fld>
             <a:endParaRPr lang="ko-KR" altLang="en-US"/>
           </a:p>
@@ -2079,7 +2079,7 @@
           <a:p>
             <a:fld id="{A03C0857-5E83-4ED7-8050-78E5F8A15FA7}" type="datetimeFigureOut">
               <a:rPr lang="ko-KR" altLang="en-US" smtClean="0"/>
-              <a:t>2025-09-03</a:t>
+              <a:t>2025-09-04</a:t>
             </a:fld>
             <a:endParaRPr lang="ko-KR" altLang="en-US"/>
           </a:p>
@@ -2390,7 +2390,7 @@
           <a:p>
             <a:fld id="{A03C0857-5E83-4ED7-8050-78E5F8A15FA7}" type="datetimeFigureOut">
               <a:rPr lang="ko-KR" altLang="en-US" smtClean="0"/>
-              <a:t>2025-09-03</a:t>
+              <a:t>2025-09-04</a:t>
             </a:fld>
             <a:endParaRPr lang="ko-KR" altLang="en-US"/>
           </a:p>
@@ -2678,7 +2678,7 @@
           <a:p>
             <a:fld id="{A03C0857-5E83-4ED7-8050-78E5F8A15FA7}" type="datetimeFigureOut">
               <a:rPr lang="ko-KR" altLang="en-US" smtClean="0"/>
-              <a:t>2025-09-03</a:t>
+              <a:t>2025-09-04</a:t>
             </a:fld>
             <a:endParaRPr lang="ko-KR" altLang="en-US"/>
           </a:p>
@@ -2919,7 +2919,7 @@
           <a:p>
             <a:fld id="{A03C0857-5E83-4ED7-8050-78E5F8A15FA7}" type="datetimeFigureOut">
               <a:rPr lang="ko-KR" altLang="en-US" smtClean="0"/>
-              <a:t>2025-09-03</a:t>
+              <a:t>2025-09-04</a:t>
             </a:fld>
             <a:endParaRPr lang="ko-KR" altLang="en-US"/>
           </a:p>
@@ -3389,6 +3389,10 @@
               <a:rPr lang="en-US" altLang="ko-KR" dirty="0" err="1"/>
               <a:t>Gitea</a:t>
             </a:r>
+            <a:r>
+              <a:rPr lang="en-US" altLang="ko-KR" dirty="0"/>
+              <a:t> 1.24.5</a:t>
+            </a:r>
             <a:endParaRPr lang="ko-KR" altLang="en-US" dirty="0"/>
           </a:p>
         </p:txBody>
@@ -3945,6 +3949,110 @@
           </a:prstGeom>
         </p:spPr>
       </p:pic>
+      <p:sp>
+        <p:nvSpPr>
+          <p:cNvPr id="3" name="직사각형 2">
+            <a:extLst>
+              <a:ext uri="{FF2B5EF4-FFF2-40B4-BE49-F238E27FC236}">
+                <a16:creationId xmlns:a16="http://schemas.microsoft.com/office/drawing/2014/main" id="{7F0AA6E7-B09E-4B28-F73A-32D14466253F}"/>
+              </a:ext>
+            </a:extLst>
+          </p:cNvPr>
+          <p:cNvSpPr/>
+          <p:nvPr/>
+        </p:nvSpPr>
+        <p:spPr>
+          <a:xfrm>
+            <a:off x="3638550" y="3359150"/>
+            <a:ext cx="1587500" cy="539750"/>
+          </a:xfrm>
+          <a:prstGeom prst="rect">
+            <a:avLst/>
+          </a:prstGeom>
+          <a:noFill/>
+          <a:ln>
+            <a:solidFill>
+              <a:srgbClr val="FF0000"/>
+            </a:solidFill>
+          </a:ln>
+        </p:spPr>
+        <p:style>
+          <a:lnRef idx="2">
+            <a:schemeClr val="accent1">
+              <a:shade val="15000"/>
+            </a:schemeClr>
+          </a:lnRef>
+          <a:fillRef idx="1">
+            <a:schemeClr val="accent1"/>
+          </a:fillRef>
+          <a:effectRef idx="0">
+            <a:schemeClr val="accent1"/>
+          </a:effectRef>
+          <a:fontRef idx="minor">
+            <a:schemeClr val="lt1"/>
+          </a:fontRef>
+        </p:style>
+        <p:txBody>
+          <a:bodyPr rtlCol="0" anchor="ctr"/>
+          <a:lstStyle/>
+          <a:p>
+            <a:pPr algn="ctr"/>
+            <a:endParaRPr lang="ko-KR" altLang="en-US"/>
+          </a:p>
+        </p:txBody>
+      </p:sp>
+      <p:sp>
+        <p:nvSpPr>
+          <p:cNvPr id="4" name="직사각형 3">
+            <a:extLst>
+              <a:ext uri="{FF2B5EF4-FFF2-40B4-BE49-F238E27FC236}">
+                <a16:creationId xmlns:a16="http://schemas.microsoft.com/office/drawing/2014/main" id="{B6CF73D1-18F9-4921-5476-7D21717FBE22}"/>
+              </a:ext>
+            </a:extLst>
+          </p:cNvPr>
+          <p:cNvSpPr/>
+          <p:nvPr/>
+        </p:nvSpPr>
+        <p:spPr>
+          <a:xfrm>
+            <a:off x="3638550" y="4768056"/>
+            <a:ext cx="4953000" cy="299244"/>
+          </a:xfrm>
+          <a:prstGeom prst="rect">
+            <a:avLst/>
+          </a:prstGeom>
+          <a:noFill/>
+          <a:ln>
+            <a:solidFill>
+              <a:srgbClr val="FF0000"/>
+            </a:solidFill>
+          </a:ln>
+        </p:spPr>
+        <p:style>
+          <a:lnRef idx="2">
+            <a:schemeClr val="accent1">
+              <a:shade val="15000"/>
+            </a:schemeClr>
+          </a:lnRef>
+          <a:fillRef idx="1">
+            <a:schemeClr val="accent1"/>
+          </a:fillRef>
+          <a:effectRef idx="0">
+            <a:schemeClr val="accent1"/>
+          </a:effectRef>
+          <a:fontRef idx="minor">
+            <a:schemeClr val="lt1"/>
+          </a:fontRef>
+        </p:style>
+        <p:txBody>
+          <a:bodyPr rtlCol="0" anchor="ctr"/>
+          <a:lstStyle/>
+          <a:p>
+            <a:pPr algn="ctr"/>
+            <a:endParaRPr lang="ko-KR" altLang="en-US"/>
+          </a:p>
+        </p:txBody>
+      </p:sp>
     </p:spTree>
     <p:extLst>
       <p:ext uri="{BB962C8B-B14F-4D97-AF65-F5344CB8AC3E}">
